--- a/EDGE-EastWest-Bank-TaxEquity-IC-Memo.pptx
+++ b/EDGE-EastWest-Bank-TaxEquity-IC-Memo.pptx
@@ -9911,7 +9911,7 @@
                 </a:solidFill>
                 <a:latin typeface="Calibri"/>
               </a:rPr>
-              <a:t>EDGE Energy IC Memo  ·  Confidential  ·  Source: Latham/KPMG tax opinion (draft) · IRC §704 regulations</a:t>
+              <a:t>EDGE Energy IC Memo  ·  Confidential  ·  Source: Outside tax counsel opinion (pending) · IRC §704 regulations</a:t>
             </a:r>
           </a:p>
         </p:txBody>
@@ -11030,7 +11030,7 @@
                 </a:solidFill>
                 <a:latin typeface="Calibri"/>
               </a:rPr>
-              <a:t>Big-4 tax opinion (Latham/Stoel Rives/KPMG) at "should" level on §704(b) Qualified Income Offset + safe harbor compliance. Sponsor 5-7 yr tax indemnity tail.</a:t>
+              <a:t>Outside tax counsel opinion pending on §704(b) Qualified Income Offset + Rev. Proc. 2007-65 safe-harbor compliance. Opinion to be finalized upon structure agreement with EastWest Bank; supplemental opinion available from Akin Gump or DLA Piper if required. Sponsor 5-7 yr tax indemnity tail.</a:t>
             </a:r>
           </a:p>
         </p:txBody>
@@ -11407,7 +11407,7 @@
                 </a:solidFill>
                 <a:latin typeface="Calibri"/>
               </a:rPr>
-              <a:t>EDGE Energy IC Memo  ·  Confidential  ·  Source: Aon recapture insurance term sheet · Latham/KPMG tax opinion (draft)</a:t>
+              <a:t>EDGE Energy IC Memo  ·  Confidential  ·  Source: Aon recapture insurance term sheet · Outside tax counsel opinion (pending)</a:t>
             </a:r>
           </a:p>
         </p:txBody>
@@ -12195,7 +12195,7 @@
                 </a:solidFill>
                 <a:latin typeface="Calibri"/>
               </a:rPr>
-              <a:t>Q2 2026</a:t>
+              <a:t>Early Q3 2026</a:t>
             </a:r>
           </a:p>
         </p:txBody>
@@ -12490,7 +12490,7 @@
                 </a:solidFill>
                 <a:latin typeface="Calibri"/>
               </a:rPr>
-              <a:t>Q3 2026</a:t>
+              <a:t>Q4 2026</a:t>
             </a:r>
           </a:p>
         </p:txBody>
@@ -12785,7 +12785,7 @@
                 </a:solidFill>
                 <a:latin typeface="Calibri"/>
               </a:rPr>
-              <a:t>Q4 2026</a:t>
+              <a:t>Q4 2026 / Q1 2027</a:t>
             </a:r>
           </a:p>
         </p:txBody>
@@ -12994,7 +12994,7 @@
                 </a:solidFill>
                 <a:latin typeface="Calibri"/>
               </a:rPr>
-              <a:t>(1) Initial diligence investment decision within 2 weeks    (2) Confirm structure preference (vintage-laddered vs lump-sum)    (3) Tax counsel introduction for Big-4 opinion coordination    (4) Insurance carrier preference (Aon / Marsh / WTW)</a:t>
+              <a:t>(1) Initial diligence investment decision within 2 weeks    (2) Confirm structure preference (vintage-laddered vs lump-sum)    (3) Tax counsel introduction for outside opinion coordination    (4) Insurance carrier preference (Aon / Marsh / WTW)</a:t>
             </a:r>
           </a:p>
         </p:txBody>
@@ -25134,7 +25134,7 @@
                 </a:solidFill>
                 <a:latin typeface="Calibri"/>
               </a:rPr>
-              <a:t>Lauren Hill engagement in progress — basis bridge ($52K hardware + soft costs + §263A(f) interest + FMV uplift = $396,127) pending appraisal</a:t>
+              <a:t>CPA FMV report completed (interim §48E basis $396,127/unit); formal MAI appraisal (Lauren Hill) in progress — expected end Q2 2026</a:t>
             </a:r>
           </a:p>
         </p:txBody>
@@ -26057,7 +26057,7 @@
                 </a:solidFill>
                 <a:latin typeface="Calibri"/>
               </a:rPr>
-              <a:t>EDGE Energy IC Memo  ·  Confidential  ·  Source: USPAP cost-seg appraisal (in progress) · EDGE financial model</a:t>
+              <a:t>EDGE Energy IC Memo  ·  Confidential  ·  Source: CPA FMV report (completed) · USPAP-MAI appraisal (in progress) · EDGE financial model</a:t>
             </a:r>
           </a:p>
         </p:txBody>
@@ -26872,7 +26872,7 @@
                 </a:solidFill>
                 <a:latin typeface="Calibri"/>
               </a:rPr>
-              <a:t>Big-4 tax opinion (Latham / KPMG)</a:t>
+              <a:t>Outside tax counsel opinion (pending) — supplemental via Akin Gump / DLA Piper if required</a:t>
             </a:r>
           </a:p>
         </p:txBody>

--- a/EDGE-EastWest-Bank-TaxEquity-IC-Memo.pptx
+++ b/EDGE-EastWest-Bank-TaxEquity-IC-Memo.pptx
@@ -5320,7 +5320,7 @@
                 </a:solidFill>
                 <a:latin typeface="Calibri"/>
               </a:rPr>
-              <a:t>Yield-based flip triggers when Class A reaches 8% after-tax IRR (M60 = month 60 minimum per Rev. Proc. 2007-65 §4.06).</a:t>
+              <a:t>Yield-based flip triggers when Class A reaches 8% after-tax IRR (60-month minimum hold per Rev. Proc. 2007-65 §4.06).</a:t>
             </a:r>
           </a:p>
         </p:txBody>
@@ -7078,7 +7078,7 @@
                 </a:solidFill>
                 <a:latin typeface="Calibri"/>
               </a:rPr>
-              <a:t>M60 (60 mo.) min., M72 (72 mo.) floor</a:t>
+              <a:t>60-mo. statutory min.; 72-mo. structural hold</a:t>
             </a:r>
           </a:p>
         </p:txBody>
@@ -11554,7 +11554,7 @@
                 </a:solidFill>
                 <a:latin typeface="Georgia"/>
               </a:rPr>
-              <a:t>Six-month path from term sheet to first vintage placed in service.</a:t>
+              <a:t>Six-month path from diligence kickoff to first vintage in service.</a:t>
             </a:r>
           </a:p>
         </p:txBody>
@@ -12994,7 +12994,7 @@
                 </a:solidFill>
                 <a:latin typeface="Calibri"/>
               </a:rPr>
-              <a:t>(1) Initial diligence investment decision within 2 weeks    (2) Confirm structure preference (vintage-laddered vs lump-sum)    (3) Tax counsel introduction for outside opinion coordination    (4) Insurance carrier preference (Aon / Marsh / WTW)</a:t>
+              <a:t>(1) Initial diligence go/no-go within 2 weeks    (2) Confirm structure preference (vintage-laddered vs lump-sum)    (3) Tax counsel introduction for outside opinion coordination    (4) Confirmation of insurance carrier — Aon / Marsh / WTW (rate · capacity · A-rating)</a:t>
             </a:r>
           </a:p>
         </p:txBody>
@@ -13806,6 +13806,40 @@
           </a:p>
         </p:txBody>
       </p:sp>
+      <p:sp>
+        <p:nvSpPr>
+          <p:cNvPr id="19" name="TextBox 18"/>
+          <p:cNvSpPr txBox="1"/>
+          <p:nvPr/>
+        </p:nvSpPr>
+        <p:spPr>
+          <a:xfrm>
+            <a:off x="10515600" y="6492240"/>
+            <a:ext cx="1280160" cy="274320"/>
+          </a:xfrm>
+          <a:prstGeom prst="rect">
+            <a:avLst/>
+          </a:prstGeom>
+          <a:noFill/>
+        </p:spPr>
+        <p:txBody>
+          <a:bodyPr wrap="none" lIns="0" rIns="0" tIns="0" bIns="0">
+            <a:spAutoFit/>
+          </a:bodyPr>
+          <a:lstStyle/>
+          <a:p>
+            <a:pPr algn="r"/>
+            <a:r>
+              <a:rPr sz="900" i="1">
+                <a:solidFill>
+                  <a:srgbClr val="C9A961"/>
+                </a:solidFill>
+              </a:rPr>
+              <a:t>15 / 15</a:t>
+            </a:r>
+          </a:p>
+        </p:txBody>
+      </p:sp>
     </p:spTree>
   </p:cSld>
   <p:clrMapOvr>
@@ -13989,7 +14023,7 @@
                 <a:latin typeface="Calibri"/>
               </a:rPr>
               <a:t>EDGE Energy is deploying $3.5B of distributed residential solar+storage across ERCOT Texas — 80,000 systems through 2030, fully contracted under 20-year PPAs and Leases. EDGE Energy is offering EastWest Bank the Class A position in a Partnership Flip structure compliant with the IRS Rev. Proc. 2007-65 safe harbor.
-Unlike a one-shot §6418 credit purchase, the partnership flip captures three stacked tax benefits — the §48E ITC at face value, 5-year MACRS bonus depreciation, and 99% of operating loss allocations — all sized so each year's tax shield matches your $50M annual appetite.</a:t>
+Unlike a one-shot §6418 credit purchase, the partnership flip captures three stacked tax benefits — the §48E ITC at face value, 100% bonus depreciation under §168(k) on 5-year MACRS property, and 99% of operating loss allocations — all sized so each year's tax shield matches your $50M annual appetite.</a:t>
             </a:r>
           </a:p>
         </p:txBody>
@@ -14859,7 +14893,7 @@
                 </a:solidFill>
                 <a:latin typeface="Georgia"/>
               </a:rPr>
-              <a:t>At a $50M/yr appetite, the partnership flip captures ~$231M more value than §6418</a:t>
+              <a:t>Flip captures ~$231M more value than §6418 at $50M/yr appetite</a:t>
             </a:r>
           </a:p>
         </p:txBody>
@@ -15829,7 +15863,7 @@
                 </a:solidFill>
                 <a:latin typeface="Calibri"/>
               </a:rPr>
-              <a:t>86-90¢/$</a:t>
+              <a:t>86–90¢ per $</a:t>
             </a:r>
           </a:p>
         </p:txBody>
@@ -16141,7 +16175,7 @@
                 </a:solidFill>
                 <a:latin typeface="Calibri"/>
               </a:rPr>
-              <a:t>Walk-away after closing</a:t>
+              <a:t>No continuing involvement post-purchase</a:t>
             </a:r>
           </a:p>
         </p:txBody>
@@ -18188,7 +18222,7 @@
                 </a:solidFill>
                 <a:latin typeface="Georgia"/>
               </a:rPr>
-              <a:t>Vintage-laddered — each year's tax benefits = $50M (exactly your appetite).</a:t>
+              <a:t>Vintage-laddered to match $50M annual appetite.</a:t>
             </a:r>
           </a:p>
         </p:txBody>
@@ -18272,7 +18306,7 @@
                 </a:solidFill>
                 <a:latin typeface="Calibri"/>
               </a:rPr>
-              <a:t>Each year EastWest invests $6.24M in one vintage SPE (200 homes). That vintage generates exactly $50M of Year-1 tax benefits (Class A's 99% pre-flip allocation; gross per-home values on slide 7) — the precise amount your $50M annual tax appetite can absorb. Repeated across 5 vintages = $31.2M total commitment.</a:t>
+              <a:t>Each year EastWest invests $6.24M in one vintage SPE (200 homes). That vintage generates ≈$50M of Year-1 tax benefits (Class A's 99% pre-flip allocation; gross per-home values on slide 7) — the precise amount your $50M annual tax appetite can absorb. Repeated across 5 vintages = $31.2M total commitment.</a:t>
             </a:r>
           </a:p>
         </p:txBody>
@@ -18832,7 +18866,7 @@
                 </a:solidFill>
                 <a:latin typeface="Consolas"/>
               </a:rPr>
-              <a:t>$50.0M</a:t>
+              <a:t>≈$50M</a:t>
             </a:r>
           </a:p>
         </p:txBody>
@@ -19392,7 +19426,7 @@
                 </a:solidFill>
                 <a:latin typeface="Consolas"/>
               </a:rPr>
-              <a:t>$50.0M</a:t>
+              <a:t>≈$50M</a:t>
             </a:r>
           </a:p>
         </p:txBody>
@@ -19952,7 +19986,7 @@
                 </a:solidFill>
                 <a:latin typeface="Consolas"/>
               </a:rPr>
-              <a:t>$50.0M</a:t>
+              <a:t>≈$50M</a:t>
             </a:r>
           </a:p>
         </p:txBody>
@@ -20512,7 +20546,7 @@
                 </a:solidFill>
                 <a:latin typeface="Consolas"/>
               </a:rPr>
-              <a:t>$50.0M</a:t>
+              <a:t>≈$50M</a:t>
             </a:r>
           </a:p>
         </p:txBody>
@@ -21072,7 +21106,7 @@
                 </a:solidFill>
                 <a:latin typeface="Consolas"/>
               </a:rPr>
-              <a:t>$50.0M</a:t>
+              <a:t>≈$50M</a:t>
             </a:r>
           </a:p>
         </p:txBody>
@@ -21242,7 +21276,7 @@
                 </a:solidFill>
                 <a:latin typeface="Calibri"/>
               </a:rPr>
-              <a:t>1,000 homes  ·  $31.2M Class A capital  ·  $188.3M ITC + $62.6M dep shield + $46.1M ops tail = $297M</a:t>
+              <a:t>1,000 homes  ·  $31.2M Class A capital  ·  $188.5M ITC + $62.5M dep shield + $46.0M ops tail = $297M</a:t>
             </a:r>
           </a:p>
         </p:txBody>
@@ -24765,7 +24799,7 @@
                 </a:solidFill>
                 <a:latin typeface="Calibri"/>
               </a:rPr>
-              <a:t>delivered through 2030  ·  EastWest tranche: $52M (1.25%)</a:t>
+              <a:t>delivered through 2030  ·  EastWest tranche: $52M (1.5% of program capex)</a:t>
             </a:r>
           </a:p>
         </p:txBody>
@@ -26456,7 +26490,7 @@
                 </a:solidFill>
                 <a:latin typeface="Calibri"/>
               </a:rPr>
-              <a:t>Sponsor team includes Paul Christodoulou (CFO), Mark Bench (CEO), and Greg Kelsch (CIO) — combined 50+ years of renewable finance, project development, and operations.</a:t>
+              <a:t>Sponsor principals: Paul Christodoulou (CFO), Mark Bench (CEO), Greg Kelsch (CIO).</a:t>
             </a:r>
           </a:p>
         </p:txBody>
@@ -27418,7 +27452,7 @@
                 </a:solidFill>
                 <a:latin typeface="Calibri"/>
               </a:rPr>
-              <a:t>Financial model v60-39 (audit-converged)</a:t>
+              <a:t>Financial model v60-40 (audit-converged)</a:t>
             </a:r>
           </a:p>
         </p:txBody>

--- a/EDGE-EastWest-Bank-TaxEquity-IC-Memo.pptx
+++ b/EDGE-EastWest-Bank-TaxEquity-IC-Memo.pptx
@@ -16454,7 +16454,7 @@
                 </a:solidFill>
                 <a:latin typeface="Calibri"/>
               </a:rPr>
-              <a:t>EDGE Energy IC Memo  ·  Confidential  ·  Source: EDGE financial model v60-40 · §6418 comparative analysis</a:t>
+              <a:t>EDGE Energy IC Memo  ·  Confidential  ·  Source: EDGE financial model v6.0 · §6418 comparative analysis</a:t>
             </a:r>
           </a:p>
         </p:txBody>
@@ -18075,7 +18075,7 @@
                 </a:solidFill>
                 <a:latin typeface="Calibri"/>
               </a:rPr>
-              <a:t>EDGE Energy IC Memo  ·  Confidential  ·  Source: EDGE financial model v60-40 · Boundless v2.6 debt term sheet</a:t>
+              <a:t>EDGE Energy IC Memo  ·  Confidential  ·  Source: EDGE financial model v6.0 · Boundless v2.6 debt term sheet</a:t>
             </a:r>
           </a:p>
         </p:txBody>
@@ -21393,7 +21393,7 @@
                 </a:solidFill>
                 <a:latin typeface="Calibri"/>
               </a:rPr>
-              <a:t>EDGE Energy IC Memo  ·  Confidential  ·  Source: EDGE financial model v60-40 · §704(b) waterfall</a:t>
+              <a:t>EDGE Energy IC Memo  ·  Confidential  ·  Source: EDGE financial model v6.0 · §704(b) waterfall</a:t>
             </a:r>
           </a:p>
         </p:txBody>
@@ -24322,7 +24322,7 @@
                 </a:solidFill>
                 <a:latin typeface="Calibri"/>
               </a:rPr>
-              <a:t>EDGE Energy IC Memo  ·  Confidential  ·  Source: EDGE financial model v60-40 · Class A flip waterfall</a:t>
+              <a:t>EDGE Energy IC Memo  ·  Confidential  ·  Source: EDGE financial model v6.0 · Class A flip waterfall</a:t>
             </a:r>
           </a:p>
         </p:txBody>
@@ -27452,7 +27452,7 @@
                 </a:solidFill>
                 <a:latin typeface="Calibri"/>
               </a:rPr>
-              <a:t>Financial model v60-40 (audit-converged)</a:t>
+              <a:t>Financial model v6.0 (audit-converged)</a:t>
             </a:r>
           </a:p>
         </p:txBody>

--- a/EDGE-EastWest-Bank-TaxEquity-IC-Memo.pptx
+++ b/EDGE-EastWest-Bank-TaxEquity-IC-Memo.pptx
@@ -13600,7 +13600,7 @@
                 </a:solidFill>
                 <a:latin typeface="Calibri"/>
               </a:rPr>
-              <a:t>exactly — no carry-forward erosion</a:t>
+              <a:t>no carry-forward erosion</a:t>
             </a:r>
           </a:p>
         </p:txBody>
